--- a/這是天父世界(粵語版).pptx
+++ b/這是天父世界(粵語版).pptx
@@ -111,7 +111,7 @@
   </p:defaultTextStyle>
   <p:extLst>
     <p:ext uri="{EFAFB233-063F-42B5-8137-9DF3F51BA10A}">
-      <p15:sldGuideLst xmlns:p15="http://schemas.microsoft.com/office/powerpoint/2012/main">
+      <p15:sldGuideLst xmlns:p15="http://schemas.microsoft.com/office/powerpoint/2012/main" xmlns="">
         <p15:guide id="1" orient="horz" pos="1620">
           <p15:clr>
             <a:srgbClr val="A4A3A4"/>
@@ -309,7 +309,8 @@
           <a:p>
             <a:fld id="{4501EB18-C390-4468-93A4-92969EAFDCFE}" type="datetimeFigureOut">
               <a:rPr lang="en-US" smtClean="0"/>
-              <a:t>6/13/2020</a:t>
+              <a:pPr/>
+              <a:t>1/9/2024</a:t>
             </a:fld>
             <a:endParaRPr lang="en-US"/>
           </a:p>
@@ -351,6 +352,7 @@
           <a:p>
             <a:fld id="{0FA593BC-F270-49AE-A5AC-7A84EB73802A}" type="slidenum">
               <a:rPr lang="en-US" smtClean="0"/>
+              <a:pPr/>
               <a:t>‹#›</a:t>
             </a:fld>
             <a:endParaRPr lang="en-US"/>
@@ -474,7 +476,8 @@
           <a:p>
             <a:fld id="{4501EB18-C390-4468-93A4-92969EAFDCFE}" type="datetimeFigureOut">
               <a:rPr lang="en-US" smtClean="0"/>
-              <a:t>6/13/2020</a:t>
+              <a:pPr/>
+              <a:t>1/9/2024</a:t>
             </a:fld>
             <a:endParaRPr lang="en-US"/>
           </a:p>
@@ -516,6 +519,7 @@
           <a:p>
             <a:fld id="{0FA593BC-F270-49AE-A5AC-7A84EB73802A}" type="slidenum">
               <a:rPr lang="en-US" smtClean="0"/>
+              <a:pPr/>
               <a:t>‹#›</a:t>
             </a:fld>
             <a:endParaRPr lang="en-US"/>
@@ -649,7 +653,8 @@
           <a:p>
             <a:fld id="{4501EB18-C390-4468-93A4-92969EAFDCFE}" type="datetimeFigureOut">
               <a:rPr lang="en-US" smtClean="0"/>
-              <a:t>6/13/2020</a:t>
+              <a:pPr/>
+              <a:t>1/9/2024</a:t>
             </a:fld>
             <a:endParaRPr lang="en-US"/>
           </a:p>
@@ -691,6 +696,7 @@
           <a:p>
             <a:fld id="{0FA593BC-F270-49AE-A5AC-7A84EB73802A}" type="slidenum">
               <a:rPr lang="en-US" smtClean="0"/>
+              <a:pPr/>
               <a:t>‹#›</a:t>
             </a:fld>
             <a:endParaRPr lang="en-US"/>
@@ -814,7 +820,8 @@
           <a:p>
             <a:fld id="{4501EB18-C390-4468-93A4-92969EAFDCFE}" type="datetimeFigureOut">
               <a:rPr lang="en-US" smtClean="0"/>
-              <a:t>6/13/2020</a:t>
+              <a:pPr/>
+              <a:t>1/9/2024</a:t>
             </a:fld>
             <a:endParaRPr lang="en-US"/>
           </a:p>
@@ -856,6 +863,7 @@
           <a:p>
             <a:fld id="{0FA593BC-F270-49AE-A5AC-7A84EB73802A}" type="slidenum">
               <a:rPr lang="en-US" smtClean="0"/>
+              <a:pPr/>
               <a:t>‹#›</a:t>
             </a:fld>
             <a:endParaRPr lang="en-US"/>
@@ -1055,7 +1063,8 @@
           <a:p>
             <a:fld id="{4501EB18-C390-4468-93A4-92969EAFDCFE}" type="datetimeFigureOut">
               <a:rPr lang="en-US" smtClean="0"/>
-              <a:t>6/13/2020</a:t>
+              <a:pPr/>
+              <a:t>1/9/2024</a:t>
             </a:fld>
             <a:endParaRPr lang="en-US"/>
           </a:p>
@@ -1097,6 +1106,7 @@
           <a:p>
             <a:fld id="{0FA593BC-F270-49AE-A5AC-7A84EB73802A}" type="slidenum">
               <a:rPr lang="en-US" smtClean="0"/>
+              <a:pPr/>
               <a:t>‹#›</a:t>
             </a:fld>
             <a:endParaRPr lang="en-US"/>
@@ -1338,7 +1348,8 @@
           <a:p>
             <a:fld id="{4501EB18-C390-4468-93A4-92969EAFDCFE}" type="datetimeFigureOut">
               <a:rPr lang="en-US" smtClean="0"/>
-              <a:t>6/13/2020</a:t>
+              <a:pPr/>
+              <a:t>1/9/2024</a:t>
             </a:fld>
             <a:endParaRPr lang="en-US"/>
           </a:p>
@@ -1380,6 +1391,7 @@
           <a:p>
             <a:fld id="{0FA593BC-F270-49AE-A5AC-7A84EB73802A}" type="slidenum">
               <a:rPr lang="en-US" smtClean="0"/>
+              <a:pPr/>
               <a:t>‹#›</a:t>
             </a:fld>
             <a:endParaRPr lang="en-US"/>
@@ -1755,7 +1767,8 @@
           <a:p>
             <a:fld id="{4501EB18-C390-4468-93A4-92969EAFDCFE}" type="datetimeFigureOut">
               <a:rPr lang="en-US" smtClean="0"/>
-              <a:t>6/13/2020</a:t>
+              <a:pPr/>
+              <a:t>1/9/2024</a:t>
             </a:fld>
             <a:endParaRPr lang="en-US"/>
           </a:p>
@@ -1797,6 +1810,7 @@
           <a:p>
             <a:fld id="{0FA593BC-F270-49AE-A5AC-7A84EB73802A}" type="slidenum">
               <a:rPr lang="en-US" smtClean="0"/>
+              <a:pPr/>
               <a:t>‹#›</a:t>
             </a:fld>
             <a:endParaRPr lang="en-US"/>
@@ -1868,7 +1882,8 @@
           <a:p>
             <a:fld id="{4501EB18-C390-4468-93A4-92969EAFDCFE}" type="datetimeFigureOut">
               <a:rPr lang="en-US" smtClean="0"/>
-              <a:t>6/13/2020</a:t>
+              <a:pPr/>
+              <a:t>1/9/2024</a:t>
             </a:fld>
             <a:endParaRPr lang="en-US"/>
           </a:p>
@@ -1910,6 +1925,7 @@
           <a:p>
             <a:fld id="{0FA593BC-F270-49AE-A5AC-7A84EB73802A}" type="slidenum">
               <a:rPr lang="en-US" smtClean="0"/>
+              <a:pPr/>
               <a:t>‹#›</a:t>
             </a:fld>
             <a:endParaRPr lang="en-US"/>
@@ -1958,7 +1974,8 @@
           <a:p>
             <a:fld id="{4501EB18-C390-4468-93A4-92969EAFDCFE}" type="datetimeFigureOut">
               <a:rPr lang="en-US" smtClean="0"/>
-              <a:t>6/13/2020</a:t>
+              <a:pPr/>
+              <a:t>1/9/2024</a:t>
             </a:fld>
             <a:endParaRPr lang="en-US"/>
           </a:p>
@@ -2000,6 +2017,7 @@
           <a:p>
             <a:fld id="{0FA593BC-F270-49AE-A5AC-7A84EB73802A}" type="slidenum">
               <a:rPr lang="en-US" smtClean="0"/>
+              <a:pPr/>
               <a:t>‹#›</a:t>
             </a:fld>
             <a:endParaRPr lang="en-US"/>
@@ -2230,7 +2248,8 @@
           <a:p>
             <a:fld id="{4501EB18-C390-4468-93A4-92969EAFDCFE}" type="datetimeFigureOut">
               <a:rPr lang="en-US" smtClean="0"/>
-              <a:t>6/13/2020</a:t>
+              <a:pPr/>
+              <a:t>1/9/2024</a:t>
             </a:fld>
             <a:endParaRPr lang="en-US"/>
           </a:p>
@@ -2272,6 +2291,7 @@
           <a:p>
             <a:fld id="{0FA593BC-F270-49AE-A5AC-7A84EB73802A}" type="slidenum">
               <a:rPr lang="en-US" smtClean="0"/>
+              <a:pPr/>
               <a:t>‹#›</a:t>
             </a:fld>
             <a:endParaRPr lang="en-US"/>
@@ -2482,7 +2502,8 @@
           <a:p>
             <a:fld id="{4501EB18-C390-4468-93A4-92969EAFDCFE}" type="datetimeFigureOut">
               <a:rPr lang="en-US" smtClean="0"/>
-              <a:t>6/13/2020</a:t>
+              <a:pPr/>
+              <a:t>1/9/2024</a:t>
             </a:fld>
             <a:endParaRPr lang="en-US"/>
           </a:p>
@@ -2524,6 +2545,7 @@
           <a:p>
             <a:fld id="{0FA593BC-F270-49AE-A5AC-7A84EB73802A}" type="slidenum">
               <a:rPr lang="en-US" smtClean="0"/>
+              <a:pPr/>
               <a:t>‹#›</a:t>
             </a:fld>
             <a:endParaRPr lang="en-US"/>
@@ -2695,7 +2717,8 @@
           <a:p>
             <a:fld id="{4501EB18-C390-4468-93A4-92969EAFDCFE}" type="datetimeFigureOut">
               <a:rPr lang="en-US" smtClean="0"/>
-              <a:t>6/13/2020</a:t>
+              <a:pPr/>
+              <a:t>1/9/2024</a:t>
             </a:fld>
             <a:endParaRPr lang="en-US"/>
           </a:p>
@@ -2773,6 +2796,7 @@
           <a:p>
             <a:fld id="{0FA593BC-F270-49AE-A5AC-7A84EB73802A}" type="slidenum">
               <a:rPr lang="en-US" smtClean="0"/>
+              <a:pPr/>
               <a:t>‹#›</a:t>
             </a:fld>
             <a:endParaRPr lang="en-US"/>
@@ -3200,14 +3224,7 @@
                 <a:latin typeface="Microsoft JhengHei" pitchFamily="34" charset="-120"/>
                 <a:ea typeface="Microsoft JhengHei" pitchFamily="34" charset="-120"/>
               </a:rPr>
-              <a:t>響</a:t>
-            </a:r>
-            <a:r>
-              <a:rPr lang="zh-CN" altLang="en-US" sz="4800" b="1" dirty="0" smtClean="0">
-                <a:latin typeface="Microsoft JhengHei" pitchFamily="34" charset="-120"/>
-                <a:ea typeface="Microsoft JhengHei" pitchFamily="34" charset="-120"/>
-              </a:rPr>
-              <a:t>應</a:t>
+              <a:t>響應</a:t>
             </a:r>
             <a:endParaRPr lang="en-US" sz="4800" dirty="0">
               <a:latin typeface="Microsoft JhengHei" pitchFamily="34" charset="-120"/>
@@ -3230,14 +3247,7 @@
                 <a:latin typeface="Microsoft JhengHei" pitchFamily="34" charset="-120"/>
                 <a:ea typeface="Microsoft JhengHei" pitchFamily="34" charset="-120"/>
               </a:rPr>
-              <a:t>辰</a:t>
-            </a:r>
-            <a:r>
-              <a:rPr lang="zh-CN" altLang="en-US" sz="4800" b="1" dirty="0" smtClean="0">
-                <a:latin typeface="Microsoft JhengHei" pitchFamily="34" charset="-120"/>
-                <a:ea typeface="Microsoft JhengHei" pitchFamily="34" charset="-120"/>
-              </a:rPr>
-              <a:t>作樂同聲</a:t>
+              <a:t>辰作樂同聲</a:t>
             </a:r>
             <a:endParaRPr lang="en-US" sz="4800" dirty="0">
               <a:latin typeface="Microsoft JhengHei" pitchFamily="34" charset="-120"/>
@@ -3279,7 +3289,7 @@
     </p:spTree>
     <p:extLst>
       <p:ext uri="{BB962C8B-B14F-4D97-AF65-F5344CB8AC3E}">
-        <p14:creationId xmlns:p14="http://schemas.microsoft.com/office/powerpoint/2010/main" val="1775328135"/>
+        <p14:creationId xmlns:p14="http://schemas.microsoft.com/office/powerpoint/2010/main" xmlns="" val="1775328135"/>
       </p:ext>
     </p:extLst>
   </p:cSld>
@@ -3427,14 +3437,7 @@
                 <a:latin typeface="Microsoft JhengHei" pitchFamily="34" charset="-120"/>
                 <a:ea typeface="Microsoft JhengHei" pitchFamily="34" charset="-120"/>
               </a:rPr>
-              <a:t>    </a:t>
-            </a:r>
-            <a:r>
-              <a:rPr lang="zh-CN" altLang="en-US" sz="4800" b="1" dirty="0" smtClean="0">
-                <a:latin typeface="Microsoft JhengHei" pitchFamily="34" charset="-120"/>
-                <a:ea typeface="Microsoft JhengHei" pitchFamily="34" charset="-120"/>
-              </a:rPr>
-              <a:t>海</a:t>
+              <a:t>    海</a:t>
             </a:r>
             <a:endParaRPr lang="en-US" sz="4800" b="1" dirty="0">
               <a:latin typeface="Microsoft JhengHei" pitchFamily="34" charset="-120"/>
@@ -3457,14 +3460,7 @@
                 <a:latin typeface="Microsoft JhengHei" pitchFamily="34" charset="-120"/>
                 <a:ea typeface="Microsoft JhengHei" pitchFamily="34" charset="-120"/>
               </a:rPr>
-              <a:t>父</a:t>
-            </a:r>
-            <a:r>
-              <a:rPr lang="zh-CN" altLang="en-US" sz="4800" b="1" dirty="0" smtClean="0">
-                <a:latin typeface="Microsoft JhengHei" pitchFamily="34" charset="-120"/>
-                <a:ea typeface="Microsoft JhengHei" pitchFamily="34" charset="-120"/>
-              </a:rPr>
-              <a:t>奇能</a:t>
+              <a:t>父奇能</a:t>
             </a:r>
             <a:endParaRPr lang="en-US" sz="4800" b="1" dirty="0">
               <a:latin typeface="Microsoft JhengHei" pitchFamily="34" charset="-120"/>
@@ -3542,7 +3538,7 @@
     </p:spTree>
     <p:extLst>
       <p:ext uri="{BB962C8B-B14F-4D97-AF65-F5344CB8AC3E}">
-        <p14:creationId xmlns:p14="http://schemas.microsoft.com/office/powerpoint/2010/main" val="4236187753"/>
+        <p14:creationId xmlns:p14="http://schemas.microsoft.com/office/powerpoint/2010/main" xmlns="" val="4236187753"/>
       </p:ext>
     </p:extLst>
   </p:cSld>
@@ -3752,7 +3748,7 @@
     </p:spTree>
     <p:extLst>
       <p:ext uri="{BB962C8B-B14F-4D97-AF65-F5344CB8AC3E}">
-        <p14:creationId xmlns:p14="http://schemas.microsoft.com/office/powerpoint/2010/main" val="3165584832"/>
+        <p14:creationId xmlns:p14="http://schemas.microsoft.com/office/powerpoint/2010/main" xmlns="" val="3165584832"/>
       </p:ext>
     </p:extLst>
   </p:cSld>
@@ -3900,21 +3896,7 @@
                 <a:latin typeface="Microsoft JhengHei" pitchFamily="34" charset="-120"/>
                 <a:ea typeface="Microsoft JhengHei" pitchFamily="34" charset="-120"/>
               </a:rPr>
-              <a:t>草聲  </a:t>
-            </a:r>
-            <a:r>
-              <a:rPr lang="zh-CN" altLang="en-US" sz="4800" b="1" dirty="0" smtClean="0">
-                <a:latin typeface="Microsoft JhengHei" pitchFamily="34" charset="-120"/>
-                <a:ea typeface="Microsoft JhengHei" pitchFamily="34" charset="-120"/>
-              </a:rPr>
-              <a:t>知</a:t>
-            </a:r>
-            <a:r>
-              <a:rPr lang="zh-CN" altLang="en-US" sz="4800" b="1" dirty="0" smtClean="0">
-                <a:latin typeface="Microsoft JhengHei" pitchFamily="34" charset="-120"/>
-                <a:ea typeface="Microsoft JhengHei" pitchFamily="34" charset="-120"/>
-              </a:rPr>
-              <a:t>祂經過</a:t>
+              <a:t>草聲  知祂經過</a:t>
             </a:r>
             <a:endParaRPr lang="en-US" sz="4800" b="1" dirty="0">
               <a:latin typeface="Microsoft JhengHei" pitchFamily="34" charset="-120"/>
@@ -3976,7 +3958,7 @@
     </p:spTree>
     <p:extLst>
       <p:ext uri="{BB962C8B-B14F-4D97-AF65-F5344CB8AC3E}">
-        <p14:creationId xmlns:p14="http://schemas.microsoft.com/office/powerpoint/2010/main" val="161943966"/>
+        <p14:creationId xmlns:p14="http://schemas.microsoft.com/office/powerpoint/2010/main" xmlns="" val="161943966"/>
       </p:ext>
     </p:extLst>
   </p:cSld>
@@ -4087,14 +4069,7 @@
                 <a:latin typeface="Microsoft JhengHei" pitchFamily="34" charset="-120"/>
                 <a:ea typeface="Microsoft JhengHei" pitchFamily="34" charset="-120"/>
               </a:rPr>
-              <a:t>我</a:t>
-            </a:r>
-            <a:r>
-              <a:rPr lang="zh-CN" altLang="en-US" sz="4800" b="1" dirty="0">
-                <a:latin typeface="Microsoft JhengHei" pitchFamily="34" charset="-120"/>
-                <a:ea typeface="Microsoft JhengHei" pitchFamily="34" charset="-120"/>
-              </a:rPr>
-              <a:t>不可鐀忘</a:t>
+              <a:t>我不可鐀忘</a:t>
             </a:r>
             <a:endParaRPr lang="en-US" sz="4800" b="1" dirty="0">
               <a:latin typeface="Microsoft JhengHei" pitchFamily="34" charset="-120"/>
@@ -4175,7 +4150,7 @@
     </p:spTree>
     <p:extLst>
       <p:ext uri="{BB962C8B-B14F-4D97-AF65-F5344CB8AC3E}">
-        <p14:creationId xmlns:p14="http://schemas.microsoft.com/office/powerpoint/2010/main" val="2173688353"/>
+        <p14:creationId xmlns:p14="http://schemas.microsoft.com/office/powerpoint/2010/main" xmlns="" val="2173688353"/>
       </p:ext>
     </p:extLst>
   </p:cSld>
@@ -4328,32 +4303,39 @@
               <a:buNone/>
             </a:pPr>
             <a:r>
-              <a:rPr lang="zh-CN" altLang="en-US" sz="4800" b="1">
+              <a:rPr lang="zh-CN" altLang="en-US" sz="4800" b="1" dirty="0">
                 <a:latin typeface="Microsoft JhengHei" pitchFamily="34" charset="-120"/>
                 <a:ea typeface="Microsoft JhengHei" pitchFamily="34" charset="-120"/>
               </a:rPr>
               <a:t>祂</a:t>
             </a:r>
             <a:r>
-              <a:rPr lang="zh-CN" altLang="en-US" sz="4800" b="1" smtClean="0">
+              <a:rPr lang="zh-CN" altLang="en-US" sz="4800" b="1" dirty="0" smtClean="0">
                 <a:latin typeface="Microsoft JhengHei" pitchFamily="34" charset="-120"/>
                 <a:ea typeface="Microsoft JhengHei" pitchFamily="34" charset="-120"/>
               </a:rPr>
               <a:t>治</a:t>
             </a:r>
             <a:r>
-              <a:rPr lang="zh-CN" altLang="en-US" sz="4800" b="1">
+              <a:rPr lang="zh-CN" altLang="en-US" sz="4800" b="1" dirty="0" smtClean="0">
                 <a:latin typeface="Microsoft JhengHei" pitchFamily="34" charset="-120"/>
                 <a:ea typeface="Microsoft JhengHei" pitchFamily="34" charset="-120"/>
               </a:rPr>
               <a:t>萬</a:t>
             </a:r>
             <a:r>
-              <a:rPr lang="zh-CN" altLang="en-US" sz="4800" b="1" smtClean="0">
-                <a:latin typeface="Microsoft JhengHei" pitchFamily="34" charset="-120"/>
-                <a:ea typeface="Microsoft JhengHei" pitchFamily="34" charset="-120"/>
-              </a:rPr>
-              <a:t>方萬方</a:t>
+              <a:rPr lang="zh-CN" altLang="en-US" sz="4800" b="1" dirty="0" smtClean="0">
+                <a:latin typeface="Microsoft JhengHei" pitchFamily="34" charset="-120"/>
+                <a:ea typeface="Microsoft JhengHei" pitchFamily="34" charset="-120"/>
+              </a:rPr>
+              <a:t>國</a:t>
+            </a:r>
+            <a:r>
+              <a:rPr lang="zh-CN" altLang="en-US" sz="4800" b="1" dirty="0" smtClean="0">
+                <a:latin typeface="Microsoft JhengHei" pitchFamily="34" charset="-120"/>
+                <a:ea typeface="Microsoft JhengHei" pitchFamily="34" charset="-120"/>
+              </a:rPr>
+              <a:t>萬方</a:t>
             </a:r>
             <a:endParaRPr lang="en-US" sz="4800" b="1" dirty="0">
               <a:latin typeface="Microsoft JhengHei" pitchFamily="34" charset="-120"/>
@@ -4395,7 +4377,7 @@
     </p:spTree>
     <p:extLst>
       <p:ext uri="{BB962C8B-B14F-4D97-AF65-F5344CB8AC3E}">
-        <p14:creationId xmlns:p14="http://schemas.microsoft.com/office/powerpoint/2010/main" val="3745409086"/>
+        <p14:creationId xmlns:p14="http://schemas.microsoft.com/office/powerpoint/2010/main" xmlns="" val="3745409086"/>
       </p:ext>
     </p:extLst>
   </p:cSld>
